--- a/CRM-система для службы грузоперевозок «TransportCRM».pptx
+++ b/CRM-система для службы грузоперевозок «TransportCRM».pptx
@@ -264,7 +264,7 @@
           <a:p>
             <a:fld id="{EF72C830-E4C9-4627-BFD4-92D44150546D}" type="datetimeFigureOut">
               <a:rPr lang="ru-RU" smtClean="0"/>
-              <a:t>13.06.2026</a:t>
+              <a:t>05.07.2026</a:t>
             </a:fld>
             <a:endParaRPr lang="ru-RU"/>
           </a:p>
@@ -434,7 +434,7 @@
           <a:p>
             <a:fld id="{EF72C830-E4C9-4627-BFD4-92D44150546D}" type="datetimeFigureOut">
               <a:rPr lang="ru-RU" smtClean="0"/>
-              <a:t>13.06.2026</a:t>
+              <a:t>05.07.2026</a:t>
             </a:fld>
             <a:endParaRPr lang="ru-RU"/>
           </a:p>
@@ -614,7 +614,7 @@
           <a:p>
             <a:fld id="{EF72C830-E4C9-4627-BFD4-92D44150546D}" type="datetimeFigureOut">
               <a:rPr lang="ru-RU" smtClean="0"/>
-              <a:t>13.06.2026</a:t>
+              <a:t>05.07.2026</a:t>
             </a:fld>
             <a:endParaRPr lang="ru-RU"/>
           </a:p>
@@ -784,7 +784,7 @@
           <a:p>
             <a:fld id="{EF72C830-E4C9-4627-BFD4-92D44150546D}" type="datetimeFigureOut">
               <a:rPr lang="ru-RU" smtClean="0"/>
-              <a:t>13.06.2026</a:t>
+              <a:t>05.07.2026</a:t>
             </a:fld>
             <a:endParaRPr lang="ru-RU"/>
           </a:p>
@@ -1030,7 +1030,7 @@
           <a:p>
             <a:fld id="{EF72C830-E4C9-4627-BFD4-92D44150546D}" type="datetimeFigureOut">
               <a:rPr lang="ru-RU" smtClean="0"/>
-              <a:t>13.06.2026</a:t>
+              <a:t>05.07.2026</a:t>
             </a:fld>
             <a:endParaRPr lang="ru-RU"/>
           </a:p>
@@ -1262,7 +1262,7 @@
           <a:p>
             <a:fld id="{EF72C830-E4C9-4627-BFD4-92D44150546D}" type="datetimeFigureOut">
               <a:rPr lang="ru-RU" smtClean="0"/>
-              <a:t>13.06.2026</a:t>
+              <a:t>05.07.2026</a:t>
             </a:fld>
             <a:endParaRPr lang="ru-RU"/>
           </a:p>
@@ -1629,7 +1629,7 @@
           <a:p>
             <a:fld id="{EF72C830-E4C9-4627-BFD4-92D44150546D}" type="datetimeFigureOut">
               <a:rPr lang="ru-RU" smtClean="0"/>
-              <a:t>13.06.2026</a:t>
+              <a:t>05.07.2026</a:t>
             </a:fld>
             <a:endParaRPr lang="ru-RU"/>
           </a:p>
@@ -1747,7 +1747,7 @@
           <a:p>
             <a:fld id="{EF72C830-E4C9-4627-BFD4-92D44150546D}" type="datetimeFigureOut">
               <a:rPr lang="ru-RU" smtClean="0"/>
-              <a:t>13.06.2026</a:t>
+              <a:t>05.07.2026</a:t>
             </a:fld>
             <a:endParaRPr lang="ru-RU"/>
           </a:p>
@@ -1842,7 +1842,7 @@
           <a:p>
             <a:fld id="{EF72C830-E4C9-4627-BFD4-92D44150546D}" type="datetimeFigureOut">
               <a:rPr lang="ru-RU" smtClean="0"/>
-              <a:t>13.06.2026</a:t>
+              <a:t>05.07.2026</a:t>
             </a:fld>
             <a:endParaRPr lang="ru-RU"/>
           </a:p>
@@ -2119,7 +2119,7 @@
           <a:p>
             <a:fld id="{EF72C830-E4C9-4627-BFD4-92D44150546D}" type="datetimeFigureOut">
               <a:rPr lang="ru-RU" smtClean="0"/>
-              <a:t>13.06.2026</a:t>
+              <a:t>05.07.2026</a:t>
             </a:fld>
             <a:endParaRPr lang="ru-RU"/>
           </a:p>
@@ -2372,7 +2372,7 @@
           <a:p>
             <a:fld id="{EF72C830-E4C9-4627-BFD4-92D44150546D}" type="datetimeFigureOut">
               <a:rPr lang="ru-RU" smtClean="0"/>
-              <a:t>13.06.2026</a:t>
+              <a:t>05.07.2026</a:t>
             </a:fld>
             <a:endParaRPr lang="ru-RU"/>
           </a:p>
@@ -2585,7 +2585,7 @@
           <a:p>
             <a:fld id="{EF72C830-E4C9-4627-BFD4-92D44150546D}" type="datetimeFigureOut">
               <a:rPr lang="ru-RU" smtClean="0"/>
-              <a:t>13.06.2026</a:t>
+              <a:t>05.07.2026</a:t>
             </a:fld>
             <a:endParaRPr lang="ru-RU"/>
           </a:p>
@@ -3095,6 +3095,13 @@
   <p:clrMapOvr>
     <a:masterClrMapping/>
   </p:clrMapOvr>
+  <p:timing>
+    <p:tnLst>
+      <p:par>
+        <p:cTn id="1" dur="indefinite" restart="never" nodeType="tmRoot"/>
+      </p:par>
+    </p:tnLst>
+  </p:timing>
 </p:sld>
 </file>
 
@@ -3362,11 +3369,7 @@
             </a:r>
             <a:r>
               <a:rPr lang="en-US" sz="2000" dirty="0" smtClean="0"/>
-              <a:t>) -&gt; tuple[float | None, float | </a:t>
-            </a:r>
-            <a:r>
-              <a:rPr lang="en-US" sz="2000" dirty="0" smtClean="0"/>
-              <a:t>None]:</a:t>
+              <a:t>) -&gt; tuple[float | None, float | None]:</a:t>
             </a:r>
           </a:p>
           <a:p>
@@ -4843,152 +4846,104 @@
           <a:lstStyle/>
           <a:p>
             <a:r>
-              <a:rPr lang="ru-RU" sz="1400" dirty="0" smtClean="0"/>
+              <a:rPr lang="ru-RU" sz="2400" dirty="0" smtClean="0"/>
               <a:t>Методы тестирования:</a:t>
             </a:r>
           </a:p>
           <a:p>
             <a:r>
-              <a:rPr lang="ru-RU" sz="1400" dirty="0" smtClean="0"/>
+              <a:rPr lang="ru-RU" sz="2400" dirty="0" smtClean="0"/>
               <a:t>Модульное тестирование с использованием </a:t>
             </a:r>
             <a:r>
-              <a:rPr lang="ru-RU" sz="1400" dirty="0" err="1" smtClean="0"/>
+              <a:rPr lang="ru-RU" sz="2400" dirty="0" err="1" smtClean="0"/>
               <a:t>pytest</a:t>
             </a:r>
             <a:r>
-              <a:rPr lang="ru-RU" sz="1400" dirty="0" smtClean="0"/>
+              <a:rPr lang="ru-RU" sz="2400" dirty="0" smtClean="0"/>
               <a:t> и </a:t>
             </a:r>
             <a:r>
-              <a:rPr lang="ru-RU" sz="1400" dirty="0" err="1" smtClean="0"/>
+              <a:rPr lang="ru-RU" sz="2400" dirty="0" err="1" smtClean="0"/>
               <a:t>pytest-django</a:t>
             </a:r>
             <a:r>
-              <a:rPr lang="ru-RU" sz="1400" dirty="0" smtClean="0"/>
+              <a:rPr lang="ru-RU" sz="2400" dirty="0" smtClean="0"/>
               <a:t>.</a:t>
             </a:r>
           </a:p>
           <a:p>
             <a:r>
-              <a:rPr lang="ru-RU" sz="1400" dirty="0" smtClean="0"/>
+              <a:rPr lang="ru-RU" sz="2400" dirty="0" smtClean="0"/>
               <a:t>Автоматическая проверка моделей, форм, представлений и бизнес-логики.</a:t>
             </a:r>
           </a:p>
           <a:p>
             <a:r>
-              <a:rPr lang="ru-RU" sz="1400" dirty="0" smtClean="0"/>
+              <a:rPr lang="ru-RU" sz="2400" dirty="0" smtClean="0"/>
               <a:t>Ручное функциональное тестирование по полному чек-листу (все роли, уведомления, документы).</a:t>
             </a:r>
           </a:p>
           <a:p>
             <a:r>
-              <a:rPr lang="ru-RU" sz="1400" dirty="0" smtClean="0"/>
+              <a:rPr lang="ru-RU" sz="2400" dirty="0" smtClean="0"/>
               <a:t>Тестирование </a:t>
             </a:r>
             <a:r>
-              <a:rPr lang="ru-RU" sz="1400" dirty="0" err="1" smtClean="0"/>
+              <a:rPr lang="ru-RU" sz="2400" dirty="0" err="1" smtClean="0"/>
               <a:t>email</a:t>
             </a:r>
             <a:r>
-              <a:rPr lang="ru-RU" sz="1400" dirty="0" smtClean="0"/>
+              <a:rPr lang="ru-RU" sz="2400" dirty="0" smtClean="0"/>
               <a:t>-отправки через консольный </a:t>
             </a:r>
             <a:r>
-              <a:rPr lang="ru-RU" sz="1400" dirty="0" err="1" smtClean="0"/>
+              <a:rPr lang="ru-RU" sz="2400" dirty="0" err="1" smtClean="0"/>
               <a:t>бэкенд</a:t>
             </a:r>
             <a:r>
-              <a:rPr lang="ru-RU" sz="1400" dirty="0" smtClean="0"/>
+              <a:rPr lang="ru-RU" sz="2400" dirty="0" smtClean="0"/>
               <a:t> и реальный SMTP.</a:t>
             </a:r>
           </a:p>
           <a:p>
             <a:r>
-              <a:rPr lang="ru-RU" sz="1400" dirty="0" err="1" smtClean="0"/>
+              <a:rPr lang="ru-RU" sz="2400" dirty="0" err="1" smtClean="0"/>
               <a:t>Валидация</a:t>
             </a:r>
             <a:r>
-              <a:rPr lang="ru-RU" sz="1400" dirty="0" smtClean="0"/>
+              <a:rPr lang="ru-RU" sz="2400" dirty="0" smtClean="0"/>
               <a:t> расчёта расстояния и стоимости на реальных адресах.</a:t>
             </a:r>
           </a:p>
           <a:p>
             <a:r>
-              <a:rPr lang="ru-RU" sz="1400" dirty="0" smtClean="0"/>
+              <a:rPr lang="ru-RU" sz="2400" dirty="0" smtClean="0"/>
               <a:t>Результаты тестирования:</a:t>
             </a:r>
           </a:p>
           <a:p>
             <a:r>
-              <a:rPr lang="ru-RU" sz="1400" dirty="0" smtClean="0"/>
+              <a:rPr lang="ru-RU" sz="2400" dirty="0" smtClean="0"/>
               <a:t>Написано и успешно выполняется 10 автоматических тестов.</a:t>
             </a:r>
           </a:p>
           <a:p>
             <a:r>
-              <a:rPr lang="ru-RU" sz="1400" dirty="0" smtClean="0"/>
-              <a:t>Тесты покрывают:</a:t>
-            </a:r>
-          </a:p>
-          <a:p>
-            <a:r>
-              <a:rPr lang="ru-RU" sz="1400" dirty="0" smtClean="0"/>
-              <a:t>Создание моделей.</a:t>
-            </a:r>
-          </a:p>
-          <a:p>
-            <a:r>
-              <a:rPr lang="ru-RU" sz="1400" dirty="0" smtClean="0"/>
-              <a:t>Формулу расчёта стоимости.</a:t>
-            </a:r>
-          </a:p>
-          <a:p>
-            <a:r>
-              <a:rPr lang="ru-RU" sz="1400" dirty="0" smtClean="0"/>
-              <a:t>Автоматическое назначение цены при сохранении.</a:t>
-            </a:r>
-          </a:p>
-          <a:p>
-            <a:r>
-              <a:rPr lang="ru-RU" sz="1400" dirty="0" smtClean="0"/>
-              <a:t>Проверку занятости водителя.</a:t>
-            </a:r>
-          </a:p>
-          <a:p>
-            <a:r>
-              <a:rPr lang="ru-RU" sz="1400" dirty="0" smtClean="0"/>
-              <a:t>Разграничение доступа к представлениям.</a:t>
-            </a:r>
-          </a:p>
-          <a:p>
-            <a:r>
-              <a:rPr lang="ru-RU" sz="1400" dirty="0" smtClean="0"/>
-              <a:t>Оплату заказа клиентом.</a:t>
-            </a:r>
-          </a:p>
-          <a:p>
-            <a:r>
-              <a:rPr lang="ru-RU" sz="1400" dirty="0" err="1" smtClean="0"/>
-              <a:t>Валидацию</a:t>
-            </a:r>
-            <a:r>
-              <a:rPr lang="ru-RU" sz="1400" dirty="0" smtClean="0"/>
-              <a:t> форм (дата в прошлом, регистрация).</a:t>
-            </a:r>
-          </a:p>
-          <a:p>
-            <a:r>
-              <a:rPr lang="ru-RU" sz="1400" dirty="0" smtClean="0"/>
-              <a:t>Все тесты проходят (10/10), регрессионные ошибки исключены.</a:t>
-            </a:r>
-          </a:p>
-          <a:p>
-            <a:r>
-              <a:rPr lang="ru-RU" sz="1400" dirty="0" smtClean="0"/>
+              <a:rPr lang="ru-RU" sz="2400" dirty="0" smtClean="0"/>
+              <a:t>Все </a:t>
+            </a:r>
+            <a:r>
+              <a:rPr lang="ru-RU" sz="2400" dirty="0" smtClean="0"/>
+              <a:t>тесты проходят (10/10), регрессионные ошибки исключены.</a:t>
+            </a:r>
+          </a:p>
+          <a:p>
+            <a:r>
+              <a:rPr lang="ru-RU" sz="2400" dirty="0" smtClean="0"/>
               <a:t>Поставленные цели достигнуты полностью.</a:t>
             </a:r>
-            <a:endParaRPr lang="ru-RU" sz="1400" dirty="0"/>
+            <a:endParaRPr lang="ru-RU" sz="2400" dirty="0"/>
           </a:p>
         </p:txBody>
       </p:sp>
@@ -5136,6 +5091,13 @@
   <p:clrMapOvr>
     <a:masterClrMapping/>
   </p:clrMapOvr>
+  <p:timing>
+    <p:tnLst>
+      <p:par>
+        <p:cTn id="1" dur="indefinite" restart="never" nodeType="tmRoot"/>
+      </p:par>
+    </p:tnLst>
+  </p:timing>
 </p:sld>
 </file>
 
@@ -5457,18 +5419,51 @@
       </p:grpSpPr>
       <p:sp>
         <p:nvSpPr>
-          <p:cNvPr id="3" name="Объект 2"/>
-          <p:cNvSpPr>
-            <a:spLocks noGrp="1"/>
-          </p:cNvSpPr>
-          <p:nvPr>
-            <p:ph idx="4294967295"/>
+          <p:cNvPr id="2" name="Заголовок 1"/>
+          <p:cNvSpPr>
+            <a:spLocks noGrp="1"/>
+          </p:cNvSpPr>
+          <p:nvPr>
+            <p:ph type="title"/>
           </p:nvPr>
         </p:nvSpPr>
         <p:spPr>
           <a:xfrm>
-            <a:off x="839448" y="1705704"/>
-            <a:ext cx="10515600" cy="4351338"/>
+            <a:off x="831850" y="255692"/>
+            <a:ext cx="10515600" cy="1438197"/>
+          </a:xfrm>
+        </p:spPr>
+        <p:txBody>
+          <a:bodyPr/>
+          <a:lstStyle/>
+          <a:p>
+            <a:pPr algn="ctr"/>
+            <a:r>
+              <a:rPr lang="ru-RU" b="1" dirty="0"/>
+              <a:t>Спасибо за внимание</a:t>
+            </a:r>
+            <a:r>
+              <a:rPr lang="ru-RU" b="1" dirty="0" smtClean="0"/>
+              <a:t>!</a:t>
+            </a:r>
+            <a:endParaRPr lang="ru-RU" dirty="0"/>
+          </a:p>
+        </p:txBody>
+      </p:sp>
+      <p:sp>
+        <p:nvSpPr>
+          <p:cNvPr id="3" name="Объект 2"/>
+          <p:cNvSpPr>
+            <a:spLocks noGrp="1"/>
+          </p:cNvSpPr>
+          <p:nvPr>
+            <p:ph type="body" idx="1"/>
+          </p:nvPr>
+        </p:nvSpPr>
+        <p:spPr>
+          <a:xfrm>
+            <a:off x="651968" y="3582649"/>
+            <a:ext cx="10515600" cy="2177217"/>
           </a:xfrm>
         </p:spPr>
         <p:txBody>
@@ -5477,18 +5472,44 @@
           </a:bodyPr>
           <a:lstStyle/>
           <a:p>
-            <a:pPr marL="0" indent="0" algn="ctr">
+            <a:pPr marL="0" indent="0">
               <a:buNone/>
             </a:pPr>
             <a:r>
-              <a:rPr lang="ru-RU" sz="5400" b="1" dirty="0"/>
-              <a:t>Спасибо за внимание</a:t>
-            </a:r>
-            <a:r>
-              <a:rPr lang="ru-RU" sz="5400" b="1" dirty="0" smtClean="0"/>
-              <a:t>!</a:t>
-            </a:r>
-            <a:endParaRPr lang="ru-RU" sz="5400" b="1" dirty="0"/>
+              <a:rPr lang="ru-RU" sz="3600" b="1" dirty="0" smtClean="0"/>
+              <a:t>Контакты:</a:t>
+            </a:r>
+          </a:p>
+          <a:p>
+            <a:pPr marL="0" indent="0">
+              <a:buNone/>
+            </a:pPr>
+            <a:r>
+              <a:rPr lang="en-US" sz="3600" b="1" dirty="0" smtClean="0"/>
+              <a:t>Email: </a:t>
+            </a:r>
+            <a:r>
+              <a:rPr lang="en-US" sz="3200" dirty="0" smtClean="0">
+                <a:hlinkClick r:id="rId2"/>
+              </a:rPr>
+              <a:t>al-mar@list.ru</a:t>
+            </a:r>
+            <a:endParaRPr lang="en-US" sz="3200" dirty="0" smtClean="0"/>
+          </a:p>
+          <a:p>
+            <a:r>
+              <a:rPr lang="en-US" sz="3600" b="1" dirty="0" smtClean="0"/>
+              <a:t>GitHub</a:t>
+            </a:r>
+            <a:r>
+              <a:rPr lang="en-US" sz="3600" b="1" dirty="0"/>
+              <a:t>: </a:t>
+            </a:r>
+            <a:r>
+              <a:rPr lang="en-US" sz="3200" dirty="0"/>
+              <a:t>https://github.com/novovaytsk-dev</a:t>
+            </a:r>
+            <a:endParaRPr lang="ru-RU" sz="3200" dirty="0"/>
           </a:p>
         </p:txBody>
       </p:sp>
@@ -5623,6 +5644,13 @@
   <p:clrMapOvr>
     <a:masterClrMapping/>
   </p:clrMapOvr>
+  <p:timing>
+    <p:tnLst>
+      <p:par>
+        <p:cTn id="1" dur="indefinite" restart="never" nodeType="tmRoot"/>
+      </p:par>
+    </p:tnLst>
+  </p:timing>
 </p:sld>
 </file>
 
@@ -5751,6 +5779,13 @@
   <p:clrMapOvr>
     <a:masterClrMapping/>
   </p:clrMapOvr>
+  <p:timing>
+    <p:tnLst>
+      <p:par>
+        <p:cTn id="1" dur="indefinite" restart="never" nodeType="tmRoot"/>
+      </p:par>
+    </p:tnLst>
+  </p:timing>
 </p:sld>
 </file>
 

--- a/CRM-система для службы грузоперевозок «TransportCRM».pptx
+++ b/CRM-система для службы грузоперевозок «TransportCRM».pptx
@@ -8,25 +8,24 @@
     <p:sldId id="256" r:id="rId2"/>
     <p:sldId id="257" r:id="rId3"/>
     <p:sldId id="258" r:id="rId4"/>
-    <p:sldId id="259" r:id="rId5"/>
-    <p:sldId id="260" r:id="rId6"/>
-    <p:sldId id="261" r:id="rId7"/>
-    <p:sldId id="262" r:id="rId8"/>
-    <p:sldId id="263" r:id="rId9"/>
-    <p:sldId id="264" r:id="rId10"/>
-    <p:sldId id="265" r:id="rId11"/>
-    <p:sldId id="266" r:id="rId12"/>
-    <p:sldId id="267" r:id="rId13"/>
-    <p:sldId id="268" r:id="rId14"/>
-    <p:sldId id="269" r:id="rId15"/>
-    <p:sldId id="270" r:id="rId16"/>
-    <p:sldId id="271" r:id="rId17"/>
-    <p:sldId id="272" r:id="rId18"/>
-    <p:sldId id="273" r:id="rId19"/>
-    <p:sldId id="274" r:id="rId20"/>
-    <p:sldId id="275" r:id="rId21"/>
-    <p:sldId id="276" r:id="rId22"/>
-    <p:sldId id="277" r:id="rId23"/>
+    <p:sldId id="260" r:id="rId5"/>
+    <p:sldId id="261" r:id="rId6"/>
+    <p:sldId id="262" r:id="rId7"/>
+    <p:sldId id="263" r:id="rId8"/>
+    <p:sldId id="264" r:id="rId9"/>
+    <p:sldId id="265" r:id="rId10"/>
+    <p:sldId id="266" r:id="rId11"/>
+    <p:sldId id="267" r:id="rId12"/>
+    <p:sldId id="268" r:id="rId13"/>
+    <p:sldId id="269" r:id="rId14"/>
+    <p:sldId id="270" r:id="rId15"/>
+    <p:sldId id="271" r:id="rId16"/>
+    <p:sldId id="272" r:id="rId17"/>
+    <p:sldId id="273" r:id="rId18"/>
+    <p:sldId id="274" r:id="rId19"/>
+    <p:sldId id="275" r:id="rId20"/>
+    <p:sldId id="276" r:id="rId21"/>
+    <p:sldId id="277" r:id="rId22"/>
   </p:sldIdLst>
   <p:sldSz cx="12192000" cy="6858000"/>
   <p:notesSz cx="6858000" cy="9144000"/>
@@ -264,7 +263,7 @@
           <a:p>
             <a:fld id="{EF72C830-E4C9-4627-BFD4-92D44150546D}" type="datetimeFigureOut">
               <a:rPr lang="ru-RU" smtClean="0"/>
-              <a:t>05.07.2026</a:t>
+              <a:t>13.09.2026</a:t>
             </a:fld>
             <a:endParaRPr lang="ru-RU"/>
           </a:p>
@@ -434,7 +433,7 @@
           <a:p>
             <a:fld id="{EF72C830-E4C9-4627-BFD4-92D44150546D}" type="datetimeFigureOut">
               <a:rPr lang="ru-RU" smtClean="0"/>
-              <a:t>05.07.2026</a:t>
+              <a:t>13.09.2026</a:t>
             </a:fld>
             <a:endParaRPr lang="ru-RU"/>
           </a:p>
@@ -614,7 +613,7 @@
           <a:p>
             <a:fld id="{EF72C830-E4C9-4627-BFD4-92D44150546D}" type="datetimeFigureOut">
               <a:rPr lang="ru-RU" smtClean="0"/>
-              <a:t>05.07.2026</a:t>
+              <a:t>13.09.2026</a:t>
             </a:fld>
             <a:endParaRPr lang="ru-RU"/>
           </a:p>
@@ -784,7 +783,7 @@
           <a:p>
             <a:fld id="{EF72C830-E4C9-4627-BFD4-92D44150546D}" type="datetimeFigureOut">
               <a:rPr lang="ru-RU" smtClean="0"/>
-              <a:t>05.07.2026</a:t>
+              <a:t>13.09.2026</a:t>
             </a:fld>
             <a:endParaRPr lang="ru-RU"/>
           </a:p>
@@ -1030,7 +1029,7 @@
           <a:p>
             <a:fld id="{EF72C830-E4C9-4627-BFD4-92D44150546D}" type="datetimeFigureOut">
               <a:rPr lang="ru-RU" smtClean="0"/>
-              <a:t>05.07.2026</a:t>
+              <a:t>13.09.2026</a:t>
             </a:fld>
             <a:endParaRPr lang="ru-RU"/>
           </a:p>
@@ -1262,7 +1261,7 @@
           <a:p>
             <a:fld id="{EF72C830-E4C9-4627-BFD4-92D44150546D}" type="datetimeFigureOut">
               <a:rPr lang="ru-RU" smtClean="0"/>
-              <a:t>05.07.2026</a:t>
+              <a:t>13.09.2026</a:t>
             </a:fld>
             <a:endParaRPr lang="ru-RU"/>
           </a:p>
@@ -1629,7 +1628,7 @@
           <a:p>
             <a:fld id="{EF72C830-E4C9-4627-BFD4-92D44150546D}" type="datetimeFigureOut">
               <a:rPr lang="ru-RU" smtClean="0"/>
-              <a:t>05.07.2026</a:t>
+              <a:t>13.09.2026</a:t>
             </a:fld>
             <a:endParaRPr lang="ru-RU"/>
           </a:p>
@@ -1747,7 +1746,7 @@
           <a:p>
             <a:fld id="{EF72C830-E4C9-4627-BFD4-92D44150546D}" type="datetimeFigureOut">
               <a:rPr lang="ru-RU" smtClean="0"/>
-              <a:t>05.07.2026</a:t>
+              <a:t>13.09.2026</a:t>
             </a:fld>
             <a:endParaRPr lang="ru-RU"/>
           </a:p>
@@ -1842,7 +1841,7 @@
           <a:p>
             <a:fld id="{EF72C830-E4C9-4627-BFD4-92D44150546D}" type="datetimeFigureOut">
               <a:rPr lang="ru-RU" smtClean="0"/>
-              <a:t>05.07.2026</a:t>
+              <a:t>13.09.2026</a:t>
             </a:fld>
             <a:endParaRPr lang="ru-RU"/>
           </a:p>
@@ -2119,7 +2118,7 @@
           <a:p>
             <a:fld id="{EF72C830-E4C9-4627-BFD4-92D44150546D}" type="datetimeFigureOut">
               <a:rPr lang="ru-RU" smtClean="0"/>
-              <a:t>05.07.2026</a:t>
+              <a:t>13.09.2026</a:t>
             </a:fld>
             <a:endParaRPr lang="ru-RU"/>
           </a:p>
@@ -2372,7 +2371,7 @@
           <a:p>
             <a:fld id="{EF72C830-E4C9-4627-BFD4-92D44150546D}" type="datetimeFigureOut">
               <a:rPr lang="ru-RU" smtClean="0"/>
-              <a:t>05.07.2026</a:t>
+              <a:t>13.09.2026</a:t>
             </a:fld>
             <a:endParaRPr lang="ru-RU"/>
           </a:p>
@@ -2585,7 +2584,7 @@
           <a:p>
             <a:fld id="{EF72C830-E4C9-4627-BFD4-92D44150546D}" type="datetimeFigureOut">
               <a:rPr lang="ru-RU" smtClean="0"/>
-              <a:t>05.07.2026</a:t>
+              <a:t>13.09.2026</a:t>
             </a:fld>
             <a:endParaRPr lang="ru-RU"/>
           </a:p>
@@ -3134,168 +3133,6 @@
         </p:nvSpPr>
         <p:spPr/>
         <p:txBody>
-          <a:bodyPr/>
-          <a:lstStyle/>
-          <a:p>
-            <a:pPr algn="ctr"/>
-            <a:r>
-              <a:rPr lang="ru-RU" b="1" dirty="0"/>
-              <a:t>Ключевые функции </a:t>
-            </a:r>
-            <a:r>
-              <a:rPr lang="ru-RU" b="1" dirty="0" smtClean="0"/>
-              <a:t>системы</a:t>
-            </a:r>
-            <a:endParaRPr lang="ru-RU" dirty="0"/>
-          </a:p>
-        </p:txBody>
-      </p:sp>
-      <p:sp>
-        <p:nvSpPr>
-          <p:cNvPr id="3" name="Объект 2"/>
-          <p:cNvSpPr>
-            <a:spLocks noGrp="1"/>
-          </p:cNvSpPr>
-          <p:nvPr>
-            <p:ph idx="1"/>
-          </p:nvPr>
-        </p:nvSpPr>
-        <p:spPr/>
-        <p:txBody>
-          <a:bodyPr>
-            <a:normAutofit lnSpcReduction="10000"/>
-          </a:bodyPr>
-          <a:lstStyle/>
-          <a:p>
-            <a:r>
-              <a:rPr lang="ru-RU" dirty="0"/>
-              <a:t>Расчёт расстояния по дорогам (</a:t>
-            </a:r>
-            <a:r>
-              <a:rPr lang="ru-RU" dirty="0" err="1"/>
-              <a:t>Яндекс.Маршруты</a:t>
-            </a:r>
-            <a:r>
-              <a:rPr lang="ru-RU" dirty="0"/>
-              <a:t> / OSRM).</a:t>
-            </a:r>
-          </a:p>
-          <a:p>
-            <a:r>
-              <a:rPr lang="ru-RU" dirty="0"/>
-              <a:t>Автоматический расчёт стоимости по тарифу.</a:t>
-            </a:r>
-          </a:p>
-          <a:p>
-            <a:r>
-              <a:rPr lang="ru-RU" dirty="0"/>
-              <a:t>Карта с меткой точки подачи (Яндекс </a:t>
-            </a:r>
-            <a:r>
-              <a:rPr lang="ru-RU" dirty="0" err="1"/>
-              <a:t>Static</a:t>
-            </a:r>
-            <a:r>
-              <a:rPr lang="ru-RU" dirty="0"/>
-              <a:t> API).</a:t>
-            </a:r>
-          </a:p>
-          <a:p>
-            <a:r>
-              <a:rPr lang="ru-RU" dirty="0"/>
-              <a:t>История изменения статусов заказа.</a:t>
-            </a:r>
-          </a:p>
-          <a:p>
-            <a:r>
-              <a:rPr lang="ru-RU" dirty="0" err="1"/>
-              <a:t>Email</a:t>
-            </a:r>
-            <a:r>
-              <a:rPr lang="ru-RU" dirty="0"/>
-              <a:t>-уведомления </a:t>
-            </a:r>
-            <a:r>
-              <a:rPr lang="ru-RU" dirty="0" smtClean="0"/>
-              <a:t>клиентам.</a:t>
-            </a:r>
-            <a:endParaRPr lang="ru-RU" dirty="0"/>
-          </a:p>
-          <a:p>
-            <a:r>
-              <a:rPr lang="ru-RU" dirty="0"/>
-              <a:t>Telegram-уведомления водителям.</a:t>
-            </a:r>
-          </a:p>
-          <a:p>
-            <a:r>
-              <a:rPr lang="ru-RU" dirty="0" err="1"/>
-              <a:t>Дашборд</a:t>
-            </a:r>
-            <a:r>
-              <a:rPr lang="ru-RU" dirty="0"/>
-              <a:t> аналитики: выручка, топ-5 клиентов, загрузка водителей, статусы.</a:t>
-            </a:r>
-          </a:p>
-          <a:p>
-            <a:r>
-              <a:rPr lang="ru-RU" dirty="0"/>
-              <a:t>Экспорт путевого листа, счёта, акта (</a:t>
-            </a:r>
-            <a:r>
-              <a:rPr lang="ru-RU" dirty="0" err="1"/>
-              <a:t>Excel</a:t>
-            </a:r>
-            <a:r>
-              <a:rPr lang="ru-RU" dirty="0" smtClean="0"/>
-              <a:t>).</a:t>
-            </a:r>
-            <a:endParaRPr lang="ru-RU" dirty="0"/>
-          </a:p>
-        </p:txBody>
-      </p:sp>
-    </p:spTree>
-    <p:extLst>
-      <p:ext uri="{BB962C8B-B14F-4D97-AF65-F5344CB8AC3E}">
-        <p14:creationId xmlns:p14="http://schemas.microsoft.com/office/powerpoint/2010/main" val="159514172"/>
-      </p:ext>
-    </p:extLst>
-  </p:cSld>
-  <p:clrMapOvr>
-    <a:masterClrMapping/>
-  </p:clrMapOvr>
-</p:sld>
-</file>
-
-<file path=ppt/slides/slide11.xml><?xml version="1.0" encoding="utf-8"?>
-<p:sld xmlns:a="http://schemas.openxmlformats.org/drawingml/2006/main" xmlns:r="http://schemas.openxmlformats.org/officeDocument/2006/relationships" xmlns:p="http://schemas.openxmlformats.org/presentationml/2006/main">
-  <p:cSld>
-    <p:spTree>
-      <p:nvGrpSpPr>
-        <p:cNvPr id="1" name=""/>
-        <p:cNvGrpSpPr/>
-        <p:nvPr/>
-      </p:nvGrpSpPr>
-      <p:grpSpPr>
-        <a:xfrm>
-          <a:off x="0" y="0"/>
-          <a:ext cx="0" cy="0"/>
-          <a:chOff x="0" y="0"/>
-          <a:chExt cx="0" cy="0"/>
-        </a:xfrm>
-      </p:grpSpPr>
-      <p:sp>
-        <p:nvSpPr>
-          <p:cNvPr id="2" name="Заголовок 1"/>
-          <p:cNvSpPr>
-            <a:spLocks noGrp="1"/>
-          </p:cNvSpPr>
-          <p:nvPr>
-            <p:ph type="title"/>
-          </p:nvPr>
-        </p:nvSpPr>
-        <p:spPr/>
-        <p:txBody>
           <a:bodyPr>
             <a:normAutofit/>
           </a:bodyPr>
@@ -3541,7 +3378,7 @@
 </p:sld>
 </file>
 
-<file path=ppt/slides/slide12.xml><?xml version="1.0" encoding="utf-8"?>
+<file path=ppt/slides/slide11.xml><?xml version="1.0" encoding="utf-8"?>
 <p:sld xmlns:a="http://schemas.openxmlformats.org/drawingml/2006/main" xmlns:r="http://schemas.openxmlformats.org/officeDocument/2006/relationships" xmlns:p="http://schemas.openxmlformats.org/presentationml/2006/main">
   <p:cSld>
     <p:spTree>
@@ -4212,7 +4049,7 @@
 </p:sld>
 </file>
 
-<file path=ppt/slides/slide13.xml><?xml version="1.0" encoding="utf-8"?>
+<file path=ppt/slides/slide12.xml><?xml version="1.0" encoding="utf-8"?>
 <p:sld xmlns:a="http://schemas.openxmlformats.org/drawingml/2006/main" xmlns:r="http://schemas.openxmlformats.org/officeDocument/2006/relationships" xmlns:p="http://schemas.openxmlformats.org/presentationml/2006/main">
   <p:cSld>
     <p:spTree>
@@ -4304,7 +4141,7 @@
 </p:sld>
 </file>
 
-<file path=ppt/slides/slide14.xml><?xml version="1.0" encoding="utf-8"?>
+<file path=ppt/slides/slide13.xml><?xml version="1.0" encoding="utf-8"?>
 <p:sld xmlns:a="http://schemas.openxmlformats.org/drawingml/2006/main" xmlns:r="http://schemas.openxmlformats.org/officeDocument/2006/relationships" xmlns:p="http://schemas.openxmlformats.org/presentationml/2006/main">
   <p:cSld>
     <p:spTree>
@@ -4391,7 +4228,7 @@
 </p:sld>
 </file>
 
-<file path=ppt/slides/slide15.xml><?xml version="1.0" encoding="utf-8"?>
+<file path=ppt/slides/slide14.xml><?xml version="1.0" encoding="utf-8"?>
 <p:sld xmlns:a="http://schemas.openxmlformats.org/drawingml/2006/main" xmlns:r="http://schemas.openxmlformats.org/officeDocument/2006/relationships" xmlns:p="http://schemas.openxmlformats.org/presentationml/2006/main">
   <p:cSld>
     <p:spTree>
@@ -4503,7 +4340,7 @@
 </p:sld>
 </file>
 
-<file path=ppt/slides/slide16.xml><?xml version="1.0" encoding="utf-8"?>
+<file path=ppt/slides/slide15.xml><?xml version="1.0" encoding="utf-8"?>
 <p:sld xmlns:a="http://schemas.openxmlformats.org/drawingml/2006/main" xmlns:r="http://schemas.openxmlformats.org/officeDocument/2006/relationships" xmlns:p="http://schemas.openxmlformats.org/presentationml/2006/main">
   <p:cSld>
     <p:spTree>
@@ -4589,7 +4426,7 @@
 </p:sld>
 </file>
 
-<file path=ppt/slides/slide17.xml><?xml version="1.0" encoding="utf-8"?>
+<file path=ppt/slides/slide16.xml><?xml version="1.0" encoding="utf-8"?>
 <p:sld xmlns:a="http://schemas.openxmlformats.org/drawingml/2006/main" xmlns:r="http://schemas.openxmlformats.org/officeDocument/2006/relationships" xmlns:p="http://schemas.openxmlformats.org/presentationml/2006/main">
   <p:cSld>
     <p:spTree>
@@ -4680,7 +4517,7 @@
 </p:sld>
 </file>
 
-<file path=ppt/slides/slide18.xml><?xml version="1.0" encoding="utf-8"?>
+<file path=ppt/slides/slide17.xml><?xml version="1.0" encoding="utf-8"?>
 <p:sld xmlns:a="http://schemas.openxmlformats.org/drawingml/2006/main" xmlns:r="http://schemas.openxmlformats.org/officeDocument/2006/relationships" xmlns:p="http://schemas.openxmlformats.org/presentationml/2006/main">
   <p:cSld>
     <p:spTree>
@@ -4771,6 +4608,191 @@
 </p:sld>
 </file>
 
+<file path=ppt/slides/slide18.xml><?xml version="1.0" encoding="utf-8"?>
+<p:sld xmlns:a="http://schemas.openxmlformats.org/drawingml/2006/main" xmlns:r="http://schemas.openxmlformats.org/officeDocument/2006/relationships" xmlns:p="http://schemas.openxmlformats.org/presentationml/2006/main">
+  <p:cSld>
+    <p:spTree>
+      <p:nvGrpSpPr>
+        <p:cNvPr id="1" name=""/>
+        <p:cNvGrpSpPr/>
+        <p:nvPr/>
+      </p:nvGrpSpPr>
+      <p:grpSpPr>
+        <a:xfrm>
+          <a:off x="0" y="0"/>
+          <a:ext cx="0" cy="0"/>
+          <a:chOff x="0" y="0"/>
+          <a:chExt cx="0" cy="0"/>
+        </a:xfrm>
+      </p:grpSpPr>
+      <p:sp>
+        <p:nvSpPr>
+          <p:cNvPr id="2" name="Заголовок 1"/>
+          <p:cNvSpPr>
+            <a:spLocks noGrp="1"/>
+          </p:cNvSpPr>
+          <p:nvPr>
+            <p:ph type="title"/>
+          </p:nvPr>
+        </p:nvSpPr>
+        <p:spPr>
+          <a:xfrm>
+            <a:off x="838200" y="149902"/>
+            <a:ext cx="10515600" cy="809468"/>
+          </a:xfrm>
+        </p:spPr>
+        <p:txBody>
+          <a:bodyPr>
+            <a:normAutofit/>
+          </a:bodyPr>
+          <a:lstStyle/>
+          <a:p>
+            <a:pPr algn="ctr"/>
+            <a:r>
+              <a:rPr lang="ru-RU" sz="3200" b="1" dirty="0"/>
+              <a:t>Тестирование / </a:t>
+            </a:r>
+            <a:r>
+              <a:rPr lang="ru-RU" sz="3200" b="1" dirty="0" err="1" smtClean="0"/>
+              <a:t>Валидация</a:t>
+            </a:r>
+            <a:endParaRPr lang="ru-RU" sz="3200" b="1" dirty="0"/>
+          </a:p>
+        </p:txBody>
+      </p:sp>
+      <p:sp>
+        <p:nvSpPr>
+          <p:cNvPr id="3" name="Объект 2"/>
+          <p:cNvSpPr>
+            <a:spLocks noGrp="1"/>
+          </p:cNvSpPr>
+          <p:nvPr>
+            <p:ph idx="1"/>
+          </p:nvPr>
+        </p:nvSpPr>
+        <p:spPr>
+          <a:xfrm>
+            <a:off x="614597" y="839449"/>
+            <a:ext cx="11032759" cy="5771213"/>
+          </a:xfrm>
+        </p:spPr>
+        <p:txBody>
+          <a:bodyPr>
+            <a:noAutofit/>
+          </a:bodyPr>
+          <a:lstStyle/>
+          <a:p>
+            <a:r>
+              <a:rPr lang="ru-RU" sz="2400" dirty="0" smtClean="0"/>
+              <a:t>Методы тестирования:</a:t>
+            </a:r>
+          </a:p>
+          <a:p>
+            <a:r>
+              <a:rPr lang="ru-RU" sz="2400" dirty="0" smtClean="0"/>
+              <a:t>Модульное тестирование с использованием </a:t>
+            </a:r>
+            <a:r>
+              <a:rPr lang="ru-RU" sz="2400" dirty="0" err="1" smtClean="0"/>
+              <a:t>pytest</a:t>
+            </a:r>
+            <a:r>
+              <a:rPr lang="ru-RU" sz="2400" dirty="0" smtClean="0"/>
+              <a:t> и </a:t>
+            </a:r>
+            <a:r>
+              <a:rPr lang="ru-RU" sz="2400" dirty="0" err="1" smtClean="0"/>
+              <a:t>pytest-django</a:t>
+            </a:r>
+            <a:r>
+              <a:rPr lang="ru-RU" sz="2400" dirty="0" smtClean="0"/>
+              <a:t>.</a:t>
+            </a:r>
+          </a:p>
+          <a:p>
+            <a:r>
+              <a:rPr lang="ru-RU" sz="2400" dirty="0" smtClean="0"/>
+              <a:t>Автоматическая проверка моделей, форм, представлений и бизнес-логики.</a:t>
+            </a:r>
+          </a:p>
+          <a:p>
+            <a:r>
+              <a:rPr lang="ru-RU" sz="2400" dirty="0" smtClean="0"/>
+              <a:t>Ручное функциональное тестирование по полному чек-листу (все роли, уведомления, документы).</a:t>
+            </a:r>
+          </a:p>
+          <a:p>
+            <a:r>
+              <a:rPr lang="ru-RU" sz="2400" dirty="0" smtClean="0"/>
+              <a:t>Тестирование </a:t>
+            </a:r>
+            <a:r>
+              <a:rPr lang="ru-RU" sz="2400" dirty="0" err="1" smtClean="0"/>
+              <a:t>email</a:t>
+            </a:r>
+            <a:r>
+              <a:rPr lang="ru-RU" sz="2400" dirty="0" smtClean="0"/>
+              <a:t>-отправки через консольный </a:t>
+            </a:r>
+            <a:r>
+              <a:rPr lang="ru-RU" sz="2400" dirty="0" err="1" smtClean="0"/>
+              <a:t>бэкенд</a:t>
+            </a:r>
+            <a:r>
+              <a:rPr lang="ru-RU" sz="2400" dirty="0" smtClean="0"/>
+              <a:t> и реальный SMTP.</a:t>
+            </a:r>
+          </a:p>
+          <a:p>
+            <a:r>
+              <a:rPr lang="ru-RU" sz="2400" dirty="0" err="1" smtClean="0"/>
+              <a:t>Валидация</a:t>
+            </a:r>
+            <a:r>
+              <a:rPr lang="ru-RU" sz="2400" dirty="0" smtClean="0"/>
+              <a:t> расчёта расстояния и стоимости на реальных адресах.</a:t>
+            </a:r>
+          </a:p>
+          <a:p>
+            <a:r>
+              <a:rPr lang="ru-RU" sz="2400" dirty="0" smtClean="0"/>
+              <a:t>Результаты тестирования:</a:t>
+            </a:r>
+          </a:p>
+          <a:p>
+            <a:r>
+              <a:rPr lang="ru-RU" sz="2400" dirty="0" smtClean="0"/>
+              <a:t>Написано и успешно выполняется 10 автоматических тестов.</a:t>
+            </a:r>
+          </a:p>
+          <a:p>
+            <a:r>
+              <a:rPr lang="ru-RU" sz="2400" dirty="0" smtClean="0"/>
+              <a:t>Все тесты проходят (10/10), регрессионные ошибки исключены.</a:t>
+            </a:r>
+          </a:p>
+          <a:p>
+            <a:r>
+              <a:rPr lang="ru-RU" sz="2400" dirty="0" smtClean="0"/>
+              <a:t>Поставленные цели достигнуты полностью.</a:t>
+            </a:r>
+            <a:endParaRPr lang="ru-RU" sz="2400" dirty="0"/>
+          </a:p>
+        </p:txBody>
+      </p:sp>
+    </p:spTree>
+    <p:extLst>
+      <p:ext uri="{BB962C8B-B14F-4D97-AF65-F5344CB8AC3E}">
+        <p14:creationId xmlns:p14="http://schemas.microsoft.com/office/powerpoint/2010/main" val="1261297484"/>
+      </p:ext>
+    </p:extLst>
+  </p:cSld>
+  <p:clrMapOvr>
+    <a:masterClrMapping/>
+  </p:clrMapOvr>
+</p:sld>
+</file>
+
 <file path=ppt/slides/slide19.xml><?xml version="1.0" encoding="utf-8"?>
 <p:sld xmlns:a="http://schemas.openxmlformats.org/drawingml/2006/main" xmlns:r="http://schemas.openxmlformats.org/officeDocument/2006/relationships" xmlns:p="http://schemas.openxmlformats.org/presentationml/2006/main">
   <p:cSld>
@@ -4800,8 +4822,8 @@
         </p:nvSpPr>
         <p:spPr>
           <a:xfrm>
-            <a:off x="838200" y="149902"/>
-            <a:ext cx="10515600" cy="809468"/>
+            <a:off x="838200" y="365125"/>
+            <a:ext cx="10515600" cy="1358744"/>
           </a:xfrm>
         </p:spPr>
         <p:txBody>
@@ -4813,13 +4835,13 @@
             <a:pPr algn="ctr"/>
             <a:r>
               <a:rPr lang="ru-RU" sz="3200" b="1" dirty="0"/>
-              <a:t>Тестирование / </a:t>
-            </a:r>
-            <a:r>
-              <a:rPr lang="ru-RU" sz="3200" b="1" dirty="0" err="1" smtClean="0"/>
-              <a:t>Валидация</a:t>
-            </a:r>
-            <a:endParaRPr lang="ru-RU" sz="3200" b="1" dirty="0"/>
+              <a:t>Достижения целей </a:t>
+            </a:r>
+            <a:r>
+              <a:rPr lang="ru-RU" sz="3200" b="1" dirty="0" smtClean="0"/>
+              <a:t>проекта</a:t>
+            </a:r>
+            <a:endParaRPr lang="ru-RU" sz="3200" dirty="0"/>
           </a:p>
         </p:txBody>
       </p:sp>
@@ -4835,122 +4857,69 @@
         </p:nvSpPr>
         <p:spPr>
           <a:xfrm>
-            <a:off x="614597" y="839449"/>
-            <a:ext cx="11032759" cy="5771213"/>
+            <a:off x="838200" y="2053652"/>
+            <a:ext cx="10515600" cy="4123311"/>
           </a:xfrm>
         </p:spPr>
         <p:txBody>
-          <a:bodyPr>
-            <a:noAutofit/>
-          </a:bodyPr>
-          <a:lstStyle/>
-          <a:p>
-            <a:r>
-              <a:rPr lang="ru-RU" sz="2400" dirty="0" smtClean="0"/>
-              <a:t>Методы тестирования:</a:t>
-            </a:r>
-          </a:p>
-          <a:p>
-            <a:r>
-              <a:rPr lang="ru-RU" sz="2400" dirty="0" smtClean="0"/>
-              <a:t>Модульное тестирование с использованием </a:t>
-            </a:r>
-            <a:r>
-              <a:rPr lang="ru-RU" sz="2400" dirty="0" err="1" smtClean="0"/>
-              <a:t>pytest</a:t>
-            </a:r>
-            <a:r>
-              <a:rPr lang="ru-RU" sz="2400" dirty="0" smtClean="0"/>
-              <a:t> и </a:t>
-            </a:r>
-            <a:r>
-              <a:rPr lang="ru-RU" sz="2400" dirty="0" err="1" smtClean="0"/>
-              <a:t>pytest-django</a:t>
-            </a:r>
-            <a:r>
-              <a:rPr lang="ru-RU" sz="2400" dirty="0" smtClean="0"/>
-              <a:t>.</a:t>
-            </a:r>
-          </a:p>
-          <a:p>
-            <a:r>
-              <a:rPr lang="ru-RU" sz="2400" dirty="0" smtClean="0"/>
-              <a:t>Автоматическая проверка моделей, форм, представлений и бизнес-логики.</a:t>
-            </a:r>
-          </a:p>
-          <a:p>
-            <a:r>
-              <a:rPr lang="ru-RU" sz="2400" dirty="0" smtClean="0"/>
-              <a:t>Ручное функциональное тестирование по полному чек-листу (все роли, уведомления, документы).</a:t>
-            </a:r>
-          </a:p>
-          <a:p>
-            <a:r>
-              <a:rPr lang="ru-RU" sz="2400" dirty="0" smtClean="0"/>
-              <a:t>Тестирование </a:t>
-            </a:r>
-            <a:r>
-              <a:rPr lang="ru-RU" sz="2400" dirty="0" err="1" smtClean="0"/>
+          <a:bodyPr/>
+          <a:lstStyle/>
+          <a:p>
+            <a:r>
+              <a:rPr lang="ru-RU" dirty="0"/>
+              <a:t>Реализована полнофункциональная CRM для грузоперевозок.</a:t>
+            </a:r>
+          </a:p>
+          <a:p>
+            <a:r>
+              <a:rPr lang="ru-RU" dirty="0"/>
+              <a:t>Автоматизированы ключевые бизнес-процессы.</a:t>
+            </a:r>
+          </a:p>
+          <a:p>
+            <a:r>
+              <a:rPr lang="ru-RU" dirty="0"/>
+              <a:t>Обеспечено разграничение доступа по ролям.</a:t>
+            </a:r>
+          </a:p>
+          <a:p>
+            <a:r>
+              <a:rPr lang="ru-RU" dirty="0"/>
+              <a:t>Внедрены уведомления (</a:t>
+            </a:r>
+            <a:r>
+              <a:rPr lang="ru-RU" dirty="0" err="1"/>
               <a:t>email</a:t>
             </a:r>
             <a:r>
-              <a:rPr lang="ru-RU" sz="2400" dirty="0" smtClean="0"/>
-              <a:t>-отправки через консольный </a:t>
-            </a:r>
-            <a:r>
-              <a:rPr lang="ru-RU" sz="2400" dirty="0" err="1" smtClean="0"/>
-              <a:t>бэкенд</a:t>
-            </a:r>
-            <a:r>
-              <a:rPr lang="ru-RU" sz="2400" dirty="0" smtClean="0"/>
-              <a:t> и реальный SMTP.</a:t>
-            </a:r>
-          </a:p>
-          <a:p>
-            <a:r>
-              <a:rPr lang="ru-RU" sz="2400" dirty="0" err="1" smtClean="0"/>
-              <a:t>Валидация</a:t>
-            </a:r>
-            <a:r>
-              <a:rPr lang="ru-RU" sz="2400" dirty="0" smtClean="0"/>
-              <a:t> расчёта расстояния и стоимости на реальных адресах.</a:t>
-            </a:r>
-          </a:p>
-          <a:p>
-            <a:r>
-              <a:rPr lang="ru-RU" sz="2400" dirty="0" smtClean="0"/>
-              <a:t>Результаты тестирования:</a:t>
-            </a:r>
-          </a:p>
-          <a:p>
-            <a:r>
-              <a:rPr lang="ru-RU" sz="2400" dirty="0" smtClean="0"/>
-              <a:t>Написано и успешно выполняется 10 автоматических тестов.</a:t>
-            </a:r>
-          </a:p>
-          <a:p>
-            <a:r>
-              <a:rPr lang="ru-RU" sz="2400" dirty="0" smtClean="0"/>
-              <a:t>Все </a:t>
-            </a:r>
-            <a:r>
-              <a:rPr lang="ru-RU" sz="2400" dirty="0" smtClean="0"/>
-              <a:t>тесты проходят (10/10), регрессионные ошибки исключены.</a:t>
-            </a:r>
-          </a:p>
-          <a:p>
-            <a:r>
-              <a:rPr lang="ru-RU" sz="2400" dirty="0" smtClean="0"/>
-              <a:t>Поставленные цели достигнуты полностью.</a:t>
-            </a:r>
-            <a:endParaRPr lang="ru-RU" sz="2400" dirty="0"/>
+              <a:rPr lang="ru-RU" dirty="0"/>
+              <a:t>, Telegram) и аналитика.</a:t>
+            </a:r>
+          </a:p>
+          <a:p>
+            <a:r>
+              <a:rPr lang="ru-RU" dirty="0"/>
+              <a:t>Код полностью документирован.</a:t>
+            </a:r>
+          </a:p>
+          <a:p>
+            <a:r>
+              <a:rPr lang="ru-RU" dirty="0"/>
+              <a:t>Проект покрыт автоматическими тестами.</a:t>
+            </a:r>
+          </a:p>
+          <a:p>
+            <a:pPr marL="0" indent="0">
+              <a:buNone/>
+            </a:pPr>
+            <a:endParaRPr lang="ru-RU" dirty="0"/>
           </a:p>
         </p:txBody>
       </p:sp>
     </p:spTree>
     <p:extLst>
       <p:ext uri="{BB962C8B-B14F-4D97-AF65-F5344CB8AC3E}">
-        <p14:creationId xmlns:p14="http://schemas.microsoft.com/office/powerpoint/2010/main" val="1261297484"/>
+        <p14:creationId xmlns:p14="http://schemas.microsoft.com/office/powerpoint/2010/main" val="2174670471"/>
       </p:ext>
     </p:extLst>
   </p:cSld>
@@ -5128,142 +5097,6 @@
             <p:ph type="title"/>
           </p:nvPr>
         </p:nvSpPr>
-        <p:spPr>
-          <a:xfrm>
-            <a:off x="838200" y="365125"/>
-            <a:ext cx="10515600" cy="1358744"/>
-          </a:xfrm>
-        </p:spPr>
-        <p:txBody>
-          <a:bodyPr>
-            <a:normAutofit/>
-          </a:bodyPr>
-          <a:lstStyle/>
-          <a:p>
-            <a:pPr algn="ctr"/>
-            <a:r>
-              <a:rPr lang="ru-RU" sz="3200" b="1" dirty="0"/>
-              <a:t>Достижения целей </a:t>
-            </a:r>
-            <a:r>
-              <a:rPr lang="ru-RU" sz="3200" b="1" dirty="0" smtClean="0"/>
-              <a:t>проекта</a:t>
-            </a:r>
-            <a:endParaRPr lang="ru-RU" sz="3200" dirty="0"/>
-          </a:p>
-        </p:txBody>
-      </p:sp>
-      <p:sp>
-        <p:nvSpPr>
-          <p:cNvPr id="3" name="Объект 2"/>
-          <p:cNvSpPr>
-            <a:spLocks noGrp="1"/>
-          </p:cNvSpPr>
-          <p:nvPr>
-            <p:ph idx="1"/>
-          </p:nvPr>
-        </p:nvSpPr>
-        <p:spPr>
-          <a:xfrm>
-            <a:off x="838200" y="2053652"/>
-            <a:ext cx="10515600" cy="4123311"/>
-          </a:xfrm>
-        </p:spPr>
-        <p:txBody>
-          <a:bodyPr/>
-          <a:lstStyle/>
-          <a:p>
-            <a:r>
-              <a:rPr lang="ru-RU" dirty="0"/>
-              <a:t>Реализована полнофункциональная CRM для грузоперевозок.</a:t>
-            </a:r>
-          </a:p>
-          <a:p>
-            <a:r>
-              <a:rPr lang="ru-RU" dirty="0"/>
-              <a:t>Автоматизированы ключевые бизнес-процессы.</a:t>
-            </a:r>
-          </a:p>
-          <a:p>
-            <a:r>
-              <a:rPr lang="ru-RU" dirty="0"/>
-              <a:t>Обеспечено разграничение доступа по ролям.</a:t>
-            </a:r>
-          </a:p>
-          <a:p>
-            <a:r>
-              <a:rPr lang="ru-RU" dirty="0"/>
-              <a:t>Внедрены уведомления (</a:t>
-            </a:r>
-            <a:r>
-              <a:rPr lang="ru-RU" dirty="0" err="1"/>
-              <a:t>email</a:t>
-            </a:r>
-            <a:r>
-              <a:rPr lang="ru-RU" dirty="0"/>
-              <a:t>, Telegram) и аналитика.</a:t>
-            </a:r>
-          </a:p>
-          <a:p>
-            <a:r>
-              <a:rPr lang="ru-RU" dirty="0"/>
-              <a:t>Код полностью документирован.</a:t>
-            </a:r>
-          </a:p>
-          <a:p>
-            <a:r>
-              <a:rPr lang="ru-RU" dirty="0"/>
-              <a:t>Проект покрыт автоматическими тестами.</a:t>
-            </a:r>
-          </a:p>
-          <a:p>
-            <a:pPr marL="0" indent="0">
-              <a:buNone/>
-            </a:pPr>
-            <a:endParaRPr lang="ru-RU" dirty="0"/>
-          </a:p>
-        </p:txBody>
-      </p:sp>
-    </p:spTree>
-    <p:extLst>
-      <p:ext uri="{BB962C8B-B14F-4D97-AF65-F5344CB8AC3E}">
-        <p14:creationId xmlns:p14="http://schemas.microsoft.com/office/powerpoint/2010/main" val="2174670471"/>
-      </p:ext>
-    </p:extLst>
-  </p:cSld>
-  <p:clrMapOvr>
-    <a:masterClrMapping/>
-  </p:clrMapOvr>
-</p:sld>
-</file>
-
-<file path=ppt/slides/slide21.xml><?xml version="1.0" encoding="utf-8"?>
-<p:sld xmlns:a="http://schemas.openxmlformats.org/drawingml/2006/main" xmlns:r="http://schemas.openxmlformats.org/officeDocument/2006/relationships" xmlns:p="http://schemas.openxmlformats.org/presentationml/2006/main">
-  <p:cSld>
-    <p:spTree>
-      <p:nvGrpSpPr>
-        <p:cNvPr id="1" name=""/>
-        <p:cNvGrpSpPr/>
-        <p:nvPr/>
-      </p:nvGrpSpPr>
-      <p:grpSpPr>
-        <a:xfrm>
-          <a:off x="0" y="0"/>
-          <a:ext cx="0" cy="0"/>
-          <a:chOff x="0" y="0"/>
-          <a:chExt cx="0" cy="0"/>
-        </a:xfrm>
-      </p:grpSpPr>
-      <p:sp>
-        <p:nvSpPr>
-          <p:cNvPr id="2" name="Заголовок 1"/>
-          <p:cNvSpPr>
-            <a:spLocks noGrp="1"/>
-          </p:cNvSpPr>
-          <p:nvPr>
-            <p:ph type="title"/>
-          </p:nvPr>
-        </p:nvSpPr>
         <p:spPr/>
         <p:txBody>
           <a:bodyPr/>
@@ -5400,7 +5233,7 @@
 </p:sld>
 </file>
 
-<file path=ppt/slides/slide22.xml><?xml version="1.0" encoding="utf-8"?>
+<file path=ppt/slides/slide21.xml><?xml version="1.0" encoding="utf-8"?>
 <p:sld xmlns:a="http://schemas.openxmlformats.org/drawingml/2006/main" xmlns:r="http://schemas.openxmlformats.org/officeDocument/2006/relationships" xmlns:p="http://schemas.openxmlformats.org/presentationml/2006/main">
   <p:cSld>
     <p:spTree>
@@ -5690,22 +5523,22 @@
           <a:p>
             <a:pPr algn="ctr"/>
             <a:r>
-              <a:rPr lang="ru-RU" dirty="0"/>
+              <a:rPr lang="ru-RU" b="1" dirty="0"/>
               <a:t/>
             </a:r>
             <a:br>
-              <a:rPr lang="ru-RU" dirty="0"/>
+              <a:rPr lang="ru-RU" b="1" dirty="0"/>
             </a:br>
             <a:r>
               <a:rPr lang="ru-RU" sz="4900" b="1" dirty="0"/>
-              <a:t>Какую проблему решает проект?</a:t>
-            </a:r>
-            <a:r>
-              <a:rPr lang="ru-RU" dirty="0" smtClean="0"/>
+              <a:t>Цели и задачи проекта</a:t>
+            </a:r>
+            <a:r>
+              <a:rPr lang="ru-RU" b="1" dirty="0"/>
               <a:t/>
             </a:r>
             <a:br>
-              <a:rPr lang="ru-RU" dirty="0" smtClean="0"/>
+              <a:rPr lang="ru-RU" b="1" dirty="0"/>
             </a:br>
             <a:endParaRPr lang="ru-RU" dirty="0"/>
           </a:p>
@@ -5721,47 +5554,120 @@
             <p:ph idx="1"/>
           </p:nvPr>
         </p:nvSpPr>
-        <p:spPr/>
-        <p:txBody>
-          <a:bodyPr/>
-          <a:lstStyle/>
-          <a:p>
+        <p:spPr>
+          <a:xfrm>
+            <a:off x="838200" y="1690688"/>
+            <a:ext cx="10515600" cy="4486275"/>
+          </a:xfrm>
+        </p:spPr>
+        <p:txBody>
+          <a:bodyPr>
+            <a:normAutofit fontScale="92500" lnSpcReduction="20000"/>
+          </a:bodyPr>
+          <a:lstStyle/>
+          <a:p>
+            <a:r>
+              <a:rPr lang="ru-RU" b="1" dirty="0"/>
+              <a:t>Цель:</a:t>
+            </a:r>
             <a:r>
               <a:rPr lang="ru-RU" dirty="0"/>
-              <a:t>Малые транспортные компании часто работают «на бумаге» или в </a:t>
+              <a:t> разработать CRM, которая автоматизирует ключевые процессы грузоперевозок.</a:t>
+            </a:r>
+          </a:p>
+          <a:p>
+            <a:r>
+              <a:rPr lang="ru-RU" b="1" dirty="0"/>
+              <a:t>Задачи:</a:t>
+            </a:r>
+            <a:endParaRPr lang="ru-RU" dirty="0"/>
+          </a:p>
+          <a:p>
+            <a:r>
+              <a:rPr lang="ru-RU" dirty="0"/>
+              <a:t>Учёт клиентов, водителей, автомобилей, заказов.</a:t>
+            </a:r>
+          </a:p>
+          <a:p>
+            <a:r>
+              <a:rPr lang="ru-RU" dirty="0"/>
+              <a:t>Автоматический расчёт расстояния и стоимости.</a:t>
+            </a:r>
+          </a:p>
+          <a:p>
+            <a:r>
+              <a:rPr lang="ru-RU" dirty="0"/>
+              <a:t>Проверка занятости при назначении рейса.</a:t>
+            </a:r>
+          </a:p>
+          <a:p>
+            <a:r>
+              <a:rPr lang="ru-RU" dirty="0"/>
+              <a:t>Ролевая модель: диспетчер, водитель, клиент.</a:t>
+            </a:r>
+          </a:p>
+          <a:p>
+            <a:r>
+              <a:rPr lang="ru-RU" dirty="0"/>
+              <a:t>Уведомления (</a:t>
             </a:r>
             <a:r>
               <a:rPr lang="ru-RU" dirty="0" err="1"/>
-              <a:t>Excel</a:t>
+              <a:t>email</a:t>
             </a:r>
             <a:r>
               <a:rPr lang="ru-RU" dirty="0"/>
-              <a:t>.</a:t>
+              <a:t>, Telegram).</a:t>
             </a:r>
           </a:p>
           <a:p>
             <a:r>
               <a:rPr lang="ru-RU" dirty="0"/>
-              <a:t>Трудно оперативно назначать машины, контролировать занятость водителей, считать реальную стоимость по расстоянию.</a:t>
+              <a:t>Аналитика и экспорт документов.</a:t>
             </a:r>
           </a:p>
           <a:p>
             <a:r>
               <a:rPr lang="ru-RU" dirty="0"/>
-              <a:t>Нет единой базы клиентов и заказов, отсутствует аналитика и автоматические уведомления.</a:t>
-            </a:r>
-          </a:p>
-          <a:p>
-            <a:r>
-              <a:rPr lang="ru-RU" b="1" dirty="0"/>
-              <a:t>Почему это важно?</a:t>
-            </a:r>
-            <a:endParaRPr lang="ru-RU" dirty="0"/>
-          </a:p>
-          <a:p>
+              <a:t>Документирование кода (</a:t>
+            </a:r>
+            <a:r>
+              <a:rPr lang="ru-RU" dirty="0" err="1"/>
+              <a:t>docstrings</a:t>
+            </a:r>
             <a:r>
               <a:rPr lang="ru-RU" dirty="0"/>
-              <a:t>Экономия времени диспетчера, снижение ошибок, повышение прозрачности бизнеса.</a:t>
+              <a:t>, </a:t>
+            </a:r>
+            <a:r>
+              <a:rPr lang="ru-RU" dirty="0" err="1"/>
+              <a:t>type</a:t>
+            </a:r>
+            <a:r>
+              <a:rPr lang="ru-RU" dirty="0"/>
+              <a:t> </a:t>
+            </a:r>
+            <a:r>
+              <a:rPr lang="ru-RU" dirty="0" err="1"/>
+              <a:t>hints</a:t>
+            </a:r>
+            <a:r>
+              <a:rPr lang="ru-RU" dirty="0"/>
+              <a:t>).</a:t>
+            </a:r>
+          </a:p>
+          <a:p>
+            <a:r>
+              <a:rPr lang="ru-RU" dirty="0"/>
+              <a:t>Покрытие кода автоматическими тестами (</a:t>
+            </a:r>
+            <a:r>
+              <a:rPr lang="ru-RU" dirty="0" err="1"/>
+              <a:t>pytest</a:t>
+            </a:r>
+            <a:r>
+              <a:rPr lang="ru-RU" dirty="0"/>
+              <a:t>).</a:t>
             </a:r>
           </a:p>
           <a:p>
@@ -5772,20 +5678,13 @@
     </p:spTree>
     <p:extLst>
       <p:ext uri="{BB962C8B-B14F-4D97-AF65-F5344CB8AC3E}">
-        <p14:creationId xmlns:p14="http://schemas.microsoft.com/office/powerpoint/2010/main" val="43372173"/>
+        <p14:creationId xmlns:p14="http://schemas.microsoft.com/office/powerpoint/2010/main" val="2074574762"/>
       </p:ext>
     </p:extLst>
   </p:cSld>
   <p:clrMapOvr>
     <a:masterClrMapping/>
   </p:clrMapOvr>
-  <p:timing>
-    <p:tnLst>
-      <p:par>
-        <p:cTn id="1" dur="indefinite" restart="never" nodeType="tmRoot"/>
-      </p:par>
-    </p:tnLst>
-  </p:timing>
 </p:sld>
 </file>
 
@@ -5818,207 +5717,6 @@
         </p:nvSpPr>
         <p:spPr/>
         <p:txBody>
-          <a:bodyPr>
-            <a:normAutofit fontScale="90000"/>
-          </a:bodyPr>
-          <a:lstStyle/>
-          <a:p>
-            <a:pPr algn="ctr"/>
-            <a:r>
-              <a:rPr lang="ru-RU" b="1" dirty="0"/>
-              <a:t/>
-            </a:r>
-            <a:br>
-              <a:rPr lang="ru-RU" b="1" dirty="0"/>
-            </a:br>
-            <a:r>
-              <a:rPr lang="ru-RU" sz="4900" b="1" dirty="0"/>
-              <a:t>Цели и задачи проекта</a:t>
-            </a:r>
-            <a:r>
-              <a:rPr lang="ru-RU" b="1" dirty="0"/>
-              <a:t/>
-            </a:r>
-            <a:br>
-              <a:rPr lang="ru-RU" b="1" dirty="0"/>
-            </a:br>
-            <a:endParaRPr lang="ru-RU" dirty="0"/>
-          </a:p>
-        </p:txBody>
-      </p:sp>
-      <p:sp>
-        <p:nvSpPr>
-          <p:cNvPr id="3" name="Объект 2"/>
-          <p:cNvSpPr>
-            <a:spLocks noGrp="1"/>
-          </p:cNvSpPr>
-          <p:nvPr>
-            <p:ph idx="1"/>
-          </p:nvPr>
-        </p:nvSpPr>
-        <p:spPr>
-          <a:xfrm>
-            <a:off x="838200" y="1690688"/>
-            <a:ext cx="10515600" cy="4486275"/>
-          </a:xfrm>
-        </p:spPr>
-        <p:txBody>
-          <a:bodyPr>
-            <a:normAutofit fontScale="92500" lnSpcReduction="20000"/>
-          </a:bodyPr>
-          <a:lstStyle/>
-          <a:p>
-            <a:r>
-              <a:rPr lang="ru-RU" b="1" dirty="0"/>
-              <a:t>Цель:</a:t>
-            </a:r>
-            <a:r>
-              <a:rPr lang="ru-RU" dirty="0"/>
-              <a:t> разработать CRM, которая автоматизирует ключевые процессы грузоперевозок.</a:t>
-            </a:r>
-          </a:p>
-          <a:p>
-            <a:r>
-              <a:rPr lang="ru-RU" b="1" dirty="0"/>
-              <a:t>Задачи:</a:t>
-            </a:r>
-            <a:endParaRPr lang="ru-RU" dirty="0"/>
-          </a:p>
-          <a:p>
-            <a:r>
-              <a:rPr lang="ru-RU" dirty="0"/>
-              <a:t>Учёт клиентов, водителей, автомобилей, заказов.</a:t>
-            </a:r>
-          </a:p>
-          <a:p>
-            <a:r>
-              <a:rPr lang="ru-RU" dirty="0"/>
-              <a:t>Автоматический расчёт расстояния и стоимости.</a:t>
-            </a:r>
-          </a:p>
-          <a:p>
-            <a:r>
-              <a:rPr lang="ru-RU" dirty="0"/>
-              <a:t>Проверка занятости при назначении рейса.</a:t>
-            </a:r>
-          </a:p>
-          <a:p>
-            <a:r>
-              <a:rPr lang="ru-RU" dirty="0"/>
-              <a:t>Ролевая модель: диспетчер, водитель, клиент.</a:t>
-            </a:r>
-          </a:p>
-          <a:p>
-            <a:r>
-              <a:rPr lang="ru-RU" dirty="0"/>
-              <a:t>Уведомления (</a:t>
-            </a:r>
-            <a:r>
-              <a:rPr lang="ru-RU" dirty="0" err="1"/>
-              <a:t>email</a:t>
-            </a:r>
-            <a:r>
-              <a:rPr lang="ru-RU" dirty="0"/>
-              <a:t>, Telegram).</a:t>
-            </a:r>
-          </a:p>
-          <a:p>
-            <a:r>
-              <a:rPr lang="ru-RU" dirty="0"/>
-              <a:t>Аналитика и экспорт документов.</a:t>
-            </a:r>
-          </a:p>
-          <a:p>
-            <a:r>
-              <a:rPr lang="ru-RU" dirty="0"/>
-              <a:t>Документирование кода (</a:t>
-            </a:r>
-            <a:r>
-              <a:rPr lang="ru-RU" dirty="0" err="1"/>
-              <a:t>docstrings</a:t>
-            </a:r>
-            <a:r>
-              <a:rPr lang="ru-RU" dirty="0"/>
-              <a:t>, </a:t>
-            </a:r>
-            <a:r>
-              <a:rPr lang="ru-RU" dirty="0" err="1"/>
-              <a:t>type</a:t>
-            </a:r>
-            <a:r>
-              <a:rPr lang="ru-RU" dirty="0"/>
-              <a:t> </a:t>
-            </a:r>
-            <a:r>
-              <a:rPr lang="ru-RU" dirty="0" err="1"/>
-              <a:t>hints</a:t>
-            </a:r>
-            <a:r>
-              <a:rPr lang="ru-RU" dirty="0"/>
-              <a:t>).</a:t>
-            </a:r>
-          </a:p>
-          <a:p>
-            <a:r>
-              <a:rPr lang="ru-RU" dirty="0"/>
-              <a:t>Покрытие кода автоматическими тестами (</a:t>
-            </a:r>
-            <a:r>
-              <a:rPr lang="ru-RU" dirty="0" err="1"/>
-              <a:t>pytest</a:t>
-            </a:r>
-            <a:r>
-              <a:rPr lang="ru-RU" dirty="0"/>
-              <a:t>).</a:t>
-            </a:r>
-          </a:p>
-          <a:p>
-            <a:endParaRPr lang="ru-RU" dirty="0"/>
-          </a:p>
-        </p:txBody>
-      </p:sp>
-    </p:spTree>
-    <p:extLst>
-      <p:ext uri="{BB962C8B-B14F-4D97-AF65-F5344CB8AC3E}">
-        <p14:creationId xmlns:p14="http://schemas.microsoft.com/office/powerpoint/2010/main" val="2074574762"/>
-      </p:ext>
-    </p:extLst>
-  </p:cSld>
-  <p:clrMapOvr>
-    <a:masterClrMapping/>
-  </p:clrMapOvr>
-</p:sld>
-</file>
-
-<file path=ppt/slides/slide6.xml><?xml version="1.0" encoding="utf-8"?>
-<p:sld xmlns:a="http://schemas.openxmlformats.org/drawingml/2006/main" xmlns:r="http://schemas.openxmlformats.org/officeDocument/2006/relationships" xmlns:p="http://schemas.openxmlformats.org/presentationml/2006/main">
-  <p:cSld>
-    <p:spTree>
-      <p:nvGrpSpPr>
-        <p:cNvPr id="1" name=""/>
-        <p:cNvGrpSpPr/>
-        <p:nvPr/>
-      </p:nvGrpSpPr>
-      <p:grpSpPr>
-        <a:xfrm>
-          <a:off x="0" y="0"/>
-          <a:ext cx="0" cy="0"/>
-          <a:chOff x="0" y="0"/>
-          <a:chExt cx="0" cy="0"/>
-        </a:xfrm>
-      </p:grpSpPr>
-      <p:sp>
-        <p:nvSpPr>
-          <p:cNvPr id="2" name="Заголовок 1"/>
-          <p:cNvSpPr>
-            <a:spLocks noGrp="1"/>
-          </p:cNvSpPr>
-          <p:nvPr>
-            <p:ph type="title"/>
-          </p:nvPr>
-        </p:nvSpPr>
-        <p:spPr/>
-        <p:txBody>
           <a:bodyPr/>
           <a:lstStyle/>
           <a:p>
@@ -6148,7 +5846,7 @@
 </p:sld>
 </file>
 
-<file path=ppt/slides/slide7.xml><?xml version="1.0" encoding="utf-8"?>
+<file path=ppt/slides/slide6.xml><?xml version="1.0" encoding="utf-8"?>
 <p:sld xmlns:a="http://schemas.openxmlformats.org/drawingml/2006/main" xmlns:r="http://schemas.openxmlformats.org/officeDocument/2006/relationships" xmlns:p="http://schemas.openxmlformats.org/presentationml/2006/main">
   <p:cSld>
     <p:spTree>
@@ -7043,6 +6741,203 @@
 </p:sld>
 </file>
 
+<file path=ppt/slides/slide7.xml><?xml version="1.0" encoding="utf-8"?>
+<p:sld xmlns:a="http://schemas.openxmlformats.org/drawingml/2006/main" xmlns:r="http://schemas.openxmlformats.org/officeDocument/2006/relationships" xmlns:p="http://schemas.openxmlformats.org/presentationml/2006/main">
+  <p:cSld>
+    <p:spTree>
+      <p:nvGrpSpPr>
+        <p:cNvPr id="1" name=""/>
+        <p:cNvGrpSpPr/>
+        <p:nvPr/>
+      </p:nvGrpSpPr>
+      <p:grpSpPr>
+        <a:xfrm>
+          <a:off x="0" y="0"/>
+          <a:ext cx="0" cy="0"/>
+          <a:chOff x="0" y="0"/>
+          <a:chExt cx="0" cy="0"/>
+        </a:xfrm>
+      </p:grpSpPr>
+      <p:sp>
+        <p:nvSpPr>
+          <p:cNvPr id="2" name="Заголовок 1"/>
+          <p:cNvSpPr>
+            <a:spLocks noGrp="1"/>
+          </p:cNvSpPr>
+          <p:nvPr>
+            <p:ph type="title"/>
+          </p:nvPr>
+        </p:nvSpPr>
+        <p:spPr/>
+        <p:txBody>
+          <a:bodyPr/>
+          <a:lstStyle/>
+          <a:p>
+            <a:pPr algn="ctr"/>
+            <a:r>
+              <a:rPr lang="ru-RU" b="1" dirty="0"/>
+              <a:t>Архитектура системы (</a:t>
+            </a:r>
+            <a:r>
+              <a:rPr lang="en-US" b="1" dirty="0"/>
+              <a:t>MVT</a:t>
+            </a:r>
+            <a:r>
+              <a:rPr lang="en-US" b="1" dirty="0" smtClean="0"/>
+              <a:t>)</a:t>
+            </a:r>
+            <a:endParaRPr lang="ru-RU" dirty="0"/>
+          </a:p>
+        </p:txBody>
+      </p:sp>
+      <p:sp>
+        <p:nvSpPr>
+          <p:cNvPr id="3" name="Объект 2"/>
+          <p:cNvSpPr>
+            <a:spLocks noGrp="1"/>
+          </p:cNvSpPr>
+          <p:nvPr>
+            <p:ph idx="1"/>
+          </p:nvPr>
+        </p:nvSpPr>
+        <p:spPr/>
+        <p:txBody>
+          <a:bodyPr>
+            <a:normAutofit fontScale="92500" lnSpcReduction="20000"/>
+          </a:bodyPr>
+          <a:lstStyle/>
+          <a:p>
+            <a:r>
+              <a:rPr lang="ru-RU" dirty="0" smtClean="0"/>
+              <a:t>Модели (</a:t>
+            </a:r>
+            <a:r>
+              <a:rPr lang="en-US" dirty="0" smtClean="0"/>
+              <a:t>Models):</a:t>
+            </a:r>
+          </a:p>
+          <a:p>
+            <a:r>
+              <a:rPr lang="en-US" dirty="0" smtClean="0"/>
+              <a:t>Customer, Driver, Vehicle, Tariff, Order, Assignment, Payment, </a:t>
+            </a:r>
+            <a:r>
+              <a:rPr lang="en-US" dirty="0" err="1" smtClean="0"/>
+              <a:t>UserProfile</a:t>
+            </a:r>
+            <a:r>
+              <a:rPr lang="en-US" dirty="0" smtClean="0"/>
+              <a:t>, </a:t>
+            </a:r>
+            <a:r>
+              <a:rPr lang="en-US" dirty="0" err="1" smtClean="0"/>
+              <a:t>OrderStatusHistory</a:t>
+            </a:r>
+            <a:r>
+              <a:rPr lang="en-US" dirty="0" smtClean="0"/>
+              <a:t>.</a:t>
+            </a:r>
+          </a:p>
+          <a:p>
+            <a:r>
+              <a:rPr lang="ru-RU" dirty="0" smtClean="0"/>
+              <a:t>Представления (</a:t>
+            </a:r>
+            <a:r>
+              <a:rPr lang="en-US" dirty="0" smtClean="0"/>
+              <a:t>Views):</a:t>
+            </a:r>
+          </a:p>
+          <a:p>
+            <a:r>
+              <a:rPr lang="en-US" dirty="0" smtClean="0"/>
+              <a:t>CRUD </a:t>
+            </a:r>
+            <a:r>
+              <a:rPr lang="ru-RU" dirty="0" smtClean="0"/>
+              <a:t>для всех сущностей, назначение рейсов, смена статусов, аналитика, экспорт, уведомления.</a:t>
+            </a:r>
+          </a:p>
+          <a:p>
+            <a:r>
+              <a:rPr lang="ru-RU" dirty="0" smtClean="0"/>
+              <a:t>Шаблоны (</a:t>
+            </a:r>
+            <a:r>
+              <a:rPr lang="en-US" dirty="0" smtClean="0"/>
+              <a:t>Templates):</a:t>
+            </a:r>
+          </a:p>
+          <a:p>
+            <a:r>
+              <a:rPr lang="en-US" dirty="0" smtClean="0"/>
+              <a:t>Bootstrap-</a:t>
+            </a:r>
+            <a:r>
+              <a:rPr lang="ru-RU" dirty="0" smtClean="0"/>
+              <a:t>страницы с разделением по ролям.</a:t>
+            </a:r>
+          </a:p>
+          <a:p>
+            <a:r>
+              <a:rPr lang="ru-RU" dirty="0" smtClean="0"/>
+              <a:t>Внешние модули:</a:t>
+            </a:r>
+          </a:p>
+          <a:p>
+            <a:r>
+              <a:rPr lang="en-US" dirty="0" smtClean="0"/>
+              <a:t>crm/bot.py (Telegram), crm/documents.py (</a:t>
+            </a:r>
+            <a:r>
+              <a:rPr lang="ru-RU" dirty="0" smtClean="0"/>
+              <a:t>документы), </a:t>
+            </a:r>
+            <a:r>
+              <a:rPr lang="en-US" dirty="0" smtClean="0"/>
+              <a:t>management-</a:t>
+            </a:r>
+            <a:r>
+              <a:rPr lang="ru-RU" dirty="0" smtClean="0"/>
+              <a:t>команды </a:t>
+            </a:r>
+            <a:r>
+              <a:rPr lang="en-US" dirty="0" err="1" smtClean="0"/>
+              <a:t>runbot</a:t>
+            </a:r>
+            <a:r>
+              <a:rPr lang="en-US" dirty="0" smtClean="0"/>
+              <a:t> </a:t>
+            </a:r>
+            <a:r>
+              <a:rPr lang="ru-RU" dirty="0" smtClean="0"/>
+              <a:t>и </a:t>
+            </a:r>
+            <a:r>
+              <a:rPr lang="en-US" dirty="0" err="1" smtClean="0"/>
+              <a:t>runscheduler</a:t>
+            </a:r>
+            <a:r>
+              <a:rPr lang="en-US" dirty="0" smtClean="0"/>
+              <a:t>.</a:t>
+            </a:r>
+            <a:endParaRPr lang="ru-RU" dirty="0"/>
+          </a:p>
+        </p:txBody>
+      </p:sp>
+    </p:spTree>
+    <p:extLst>
+      <p:ext uri="{BB962C8B-B14F-4D97-AF65-F5344CB8AC3E}">
+        <p14:creationId xmlns:p14="http://schemas.microsoft.com/office/powerpoint/2010/main" val="2589598703"/>
+      </p:ext>
+    </p:extLst>
+  </p:cSld>
+  <p:clrMapOvr>
+    <a:masterClrMapping/>
+  </p:clrMapOvr>
+</p:sld>
+</file>
+
 <file path=ppt/slides/slide8.xml><?xml version="1.0" encoding="utf-8"?>
 <p:sld xmlns:a="http://schemas.openxmlformats.org/drawingml/2006/main" xmlns:r="http://schemas.openxmlformats.org/officeDocument/2006/relationships" xmlns:p="http://schemas.openxmlformats.org/presentationml/2006/main">
   <p:cSld>
@@ -7072,21 +6967,19 @@
         </p:nvSpPr>
         <p:spPr/>
         <p:txBody>
-          <a:bodyPr/>
+          <a:bodyPr>
+            <a:normAutofit/>
+          </a:bodyPr>
           <a:lstStyle/>
           <a:p>
             <a:pPr algn="ctr"/>
             <a:r>
               <a:rPr lang="ru-RU" b="1" dirty="0"/>
-              <a:t>Архитектура системы (</a:t>
-            </a:r>
-            <a:r>
-              <a:rPr lang="en-US" b="1" dirty="0"/>
-              <a:t>MVT</a:t>
-            </a:r>
-            <a:r>
-              <a:rPr lang="en-US" b="1" dirty="0" smtClean="0"/>
-              <a:t>)</a:t>
+              <a:t>Ролевая </a:t>
+            </a:r>
+            <a:r>
+              <a:rPr lang="ru-RU" b="1" dirty="0" smtClean="0"/>
+              <a:t>модель</a:t>
             </a:r>
             <a:endParaRPr lang="ru-RU" dirty="0"/>
           </a:p>
@@ -7105,123 +6998,51 @@
         <p:spPr/>
         <p:txBody>
           <a:bodyPr>
-            <a:normAutofit fontScale="92500" lnSpcReduction="20000"/>
+            <a:normAutofit/>
           </a:bodyPr>
           <a:lstStyle/>
           <a:p>
             <a:r>
               <a:rPr lang="ru-RU" dirty="0" smtClean="0"/>
-              <a:t>Модели (</a:t>
-            </a:r>
-            <a:r>
-              <a:rPr lang="en-US" dirty="0" smtClean="0"/>
-              <a:t>Models):</a:t>
-            </a:r>
-          </a:p>
-          <a:p>
-            <a:r>
-              <a:rPr lang="en-US" dirty="0" smtClean="0"/>
-              <a:t>Customer, Driver, Vehicle, Tariff, Order, Assignment, Payment, </a:t>
-            </a:r>
-            <a:r>
-              <a:rPr lang="en-US" dirty="0" err="1" smtClean="0"/>
-              <a:t>UserProfile</a:t>
-            </a:r>
-            <a:r>
-              <a:rPr lang="en-US" dirty="0" smtClean="0"/>
-              <a:t>, </a:t>
-            </a:r>
-            <a:r>
-              <a:rPr lang="en-US" dirty="0" err="1" smtClean="0"/>
-              <a:t>OrderStatusHistory</a:t>
-            </a:r>
-            <a:r>
-              <a:rPr lang="en-US" dirty="0" smtClean="0"/>
-              <a:t>.</a:t>
+              <a:t>Диспетчер — полный доступ: создание заказов, назначение, платежи, аналитика, документы.</a:t>
             </a:r>
           </a:p>
           <a:p>
             <a:r>
               <a:rPr lang="ru-RU" dirty="0" smtClean="0"/>
-              <a:t>Представления (</a:t>
-            </a:r>
-            <a:r>
-              <a:rPr lang="en-US" dirty="0" smtClean="0"/>
-              <a:t>Views):</a:t>
-            </a:r>
-          </a:p>
-          <a:p>
-            <a:r>
-              <a:rPr lang="en-US" dirty="0" smtClean="0"/>
-              <a:t>CRUD </a:t>
-            </a:r>
+              <a:t>Водитель — видит назначенные рейсы, может менять статус (в пути / завершён).</a:t>
+            </a:r>
+          </a:p>
+          <a:p>
             <a:r>
               <a:rPr lang="ru-RU" dirty="0" smtClean="0"/>
-              <a:t>для всех сущностей, назначение рейсов, смена статусов, аналитика, экспорт, уведомления.</a:t>
+              <a:t>Клиент — видит свои заказы, может оплатить выполненный заказ.</a:t>
             </a:r>
           </a:p>
           <a:p>
             <a:r>
               <a:rPr lang="ru-RU" dirty="0" smtClean="0"/>
-              <a:t>Шаблоны (</a:t>
-            </a:r>
-            <a:r>
-              <a:rPr lang="en-US" dirty="0" smtClean="0"/>
-              <a:t>Templates):</a:t>
-            </a:r>
-          </a:p>
-          <a:p>
-            <a:r>
-              <a:rPr lang="en-US" dirty="0" smtClean="0"/>
-              <a:t>Bootstrap-</a:t>
+              <a:t>Проверка ролей реализована через </a:t>
+            </a:r>
+            <a:r>
+              <a:rPr lang="ru-RU" dirty="0" err="1" smtClean="0"/>
+              <a:t>миксины</a:t>
             </a:r>
             <a:r>
               <a:rPr lang="ru-RU" dirty="0" smtClean="0"/>
-              <a:t>страницы с разделением по ролям.</a:t>
-            </a:r>
-          </a:p>
-          <a:p>
+              <a:t> </a:t>
+            </a:r>
+            <a:r>
+              <a:rPr lang="ru-RU" dirty="0" err="1" smtClean="0"/>
+              <a:t>UserPassesTestMixin</a:t>
+            </a:r>
             <a:r>
               <a:rPr lang="ru-RU" dirty="0" smtClean="0"/>
-              <a:t>Внешние модули:</a:t>
-            </a:r>
-          </a:p>
-          <a:p>
-            <a:r>
-              <a:rPr lang="en-US" dirty="0" smtClean="0"/>
-              <a:t>crm/bot.py (Telegram), crm/documents.py (</a:t>
-            </a:r>
-            <a:r>
-              <a:rPr lang="ru-RU" dirty="0" smtClean="0"/>
-              <a:t>документы), </a:t>
-            </a:r>
-            <a:r>
-              <a:rPr lang="en-US" dirty="0" smtClean="0"/>
-              <a:t>management-</a:t>
-            </a:r>
-            <a:r>
-              <a:rPr lang="ru-RU" dirty="0" smtClean="0"/>
-              <a:t>команды </a:t>
-            </a:r>
-            <a:r>
-              <a:rPr lang="en-US" dirty="0" err="1" smtClean="0"/>
-              <a:t>runbot</a:t>
-            </a:r>
-            <a:r>
-              <a:rPr lang="en-US" dirty="0" smtClean="0"/>
-              <a:t> </a:t>
-            </a:r>
-            <a:r>
-              <a:rPr lang="ru-RU" dirty="0" smtClean="0"/>
-              <a:t>и </a:t>
-            </a:r>
-            <a:r>
-              <a:rPr lang="en-US" dirty="0" err="1" smtClean="0"/>
-              <a:t>runscheduler</a:t>
-            </a:r>
-            <a:r>
-              <a:rPr lang="en-US" dirty="0" smtClean="0"/>
-              <a:t>.</a:t>
+              <a:t> и декораторы @</a:t>
+            </a:r>
+            <a:r>
+              <a:rPr lang="ru-RU" dirty="0" err="1" smtClean="0"/>
+              <a:t>user_passes_test</a:t>
             </a:r>
             <a:endParaRPr lang="ru-RU" dirty="0"/>
           </a:p>
@@ -7230,7 +7051,7 @@
     </p:spTree>
     <p:extLst>
       <p:ext uri="{BB962C8B-B14F-4D97-AF65-F5344CB8AC3E}">
-        <p14:creationId xmlns:p14="http://schemas.microsoft.com/office/powerpoint/2010/main" val="2589598703"/>
+        <p14:creationId xmlns:p14="http://schemas.microsoft.com/office/powerpoint/2010/main" val="3490234072"/>
       </p:ext>
     </p:extLst>
   </p:cSld>
@@ -7269,82 +7090,121 @@
         </p:nvSpPr>
         <p:spPr/>
         <p:txBody>
+          <a:bodyPr/>
+          <a:lstStyle/>
+          <a:p>
+            <a:pPr algn="ctr"/>
+            <a:r>
+              <a:rPr lang="ru-RU" b="1" dirty="0"/>
+              <a:t>Ключевые функции </a:t>
+            </a:r>
+            <a:r>
+              <a:rPr lang="ru-RU" b="1" dirty="0" smtClean="0"/>
+              <a:t>системы</a:t>
+            </a:r>
+            <a:endParaRPr lang="ru-RU" dirty="0"/>
+          </a:p>
+        </p:txBody>
+      </p:sp>
+      <p:sp>
+        <p:nvSpPr>
+          <p:cNvPr id="3" name="Объект 2"/>
+          <p:cNvSpPr>
+            <a:spLocks noGrp="1"/>
+          </p:cNvSpPr>
+          <p:nvPr>
+            <p:ph idx="1"/>
+          </p:nvPr>
+        </p:nvSpPr>
+        <p:spPr/>
+        <p:txBody>
           <a:bodyPr>
-            <a:normAutofit/>
+            <a:normAutofit lnSpcReduction="10000"/>
           </a:bodyPr>
           <a:lstStyle/>
           <a:p>
-            <a:pPr algn="ctr"/>
-            <a:r>
-              <a:rPr lang="ru-RU" b="1" dirty="0"/>
-              <a:t>Ролевая </a:t>
-            </a:r>
-            <a:r>
-              <a:rPr lang="ru-RU" b="1" dirty="0" smtClean="0"/>
-              <a:t>модель</a:t>
+            <a:r>
+              <a:rPr lang="ru-RU" dirty="0"/>
+              <a:t>Расчёт расстояния по дорогам (</a:t>
+            </a:r>
+            <a:r>
+              <a:rPr lang="ru-RU" dirty="0" err="1"/>
+              <a:t>Яндекс.Маршруты</a:t>
+            </a:r>
+            <a:r>
+              <a:rPr lang="ru-RU" dirty="0"/>
+              <a:t> / OSRM).</a:t>
+            </a:r>
+          </a:p>
+          <a:p>
+            <a:r>
+              <a:rPr lang="ru-RU" dirty="0"/>
+              <a:t>Автоматический расчёт стоимости по тарифу.</a:t>
+            </a:r>
+          </a:p>
+          <a:p>
+            <a:r>
+              <a:rPr lang="ru-RU" dirty="0"/>
+              <a:t>Карта с меткой точки подачи (Яндекс </a:t>
+            </a:r>
+            <a:r>
+              <a:rPr lang="ru-RU" dirty="0" err="1"/>
+              <a:t>Static</a:t>
+            </a:r>
+            <a:r>
+              <a:rPr lang="ru-RU" dirty="0"/>
+              <a:t> API).</a:t>
+            </a:r>
+          </a:p>
+          <a:p>
+            <a:r>
+              <a:rPr lang="ru-RU" dirty="0"/>
+              <a:t>История изменения статусов заказа.</a:t>
+            </a:r>
+          </a:p>
+          <a:p>
+            <a:r>
+              <a:rPr lang="ru-RU" dirty="0" err="1"/>
+              <a:t>Email</a:t>
+            </a:r>
+            <a:r>
+              <a:rPr lang="ru-RU" dirty="0"/>
+              <a:t>-уведомления </a:t>
+            </a:r>
+            <a:r>
+              <a:rPr lang="ru-RU" dirty="0" smtClean="0"/>
+              <a:t>клиентам.</a:t>
             </a:r>
             <a:endParaRPr lang="ru-RU" dirty="0"/>
           </a:p>
-        </p:txBody>
-      </p:sp>
-      <p:sp>
-        <p:nvSpPr>
-          <p:cNvPr id="3" name="Объект 2"/>
-          <p:cNvSpPr>
-            <a:spLocks noGrp="1"/>
-          </p:cNvSpPr>
-          <p:nvPr>
-            <p:ph idx="1"/>
-          </p:nvPr>
-        </p:nvSpPr>
-        <p:spPr/>
-        <p:txBody>
-          <a:bodyPr>
-            <a:normAutofit/>
-          </a:bodyPr>
-          <a:lstStyle/>
-          <a:p>
+          <a:p>
+            <a:r>
+              <a:rPr lang="ru-RU" dirty="0"/>
+              <a:t>Telegram-уведомления водителям.</a:t>
+            </a:r>
+          </a:p>
+          <a:p>
+            <a:r>
+              <a:rPr lang="ru-RU" dirty="0" err="1"/>
+              <a:t>Дашборд</a:t>
+            </a:r>
+            <a:r>
+              <a:rPr lang="ru-RU" dirty="0"/>
+              <a:t> аналитики: выручка, топ-5 клиентов, загрузка водителей, статусы.</a:t>
+            </a:r>
+          </a:p>
+          <a:p>
+            <a:r>
+              <a:rPr lang="ru-RU" dirty="0"/>
+              <a:t>Экспорт путевого листа, счёта, акта (</a:t>
+            </a:r>
+            <a:r>
+              <a:rPr lang="ru-RU" dirty="0" err="1"/>
+              <a:t>Excel</a:t>
+            </a:r>
             <a:r>
               <a:rPr lang="ru-RU" dirty="0" smtClean="0"/>
-              <a:t>Диспетчер — полный доступ: создание заказов, назначение, платежи, аналитика, документы.</a:t>
-            </a:r>
-          </a:p>
-          <a:p>
-            <a:r>
-              <a:rPr lang="ru-RU" dirty="0" smtClean="0"/>
-              <a:t>Водитель — видит назначенные рейсы, может менять статус (в пути / завершён).</a:t>
-            </a:r>
-          </a:p>
-          <a:p>
-            <a:r>
-              <a:rPr lang="ru-RU" dirty="0" smtClean="0"/>
-              <a:t>Клиент — видит свои заказы, может оплатить выполненный заказ.</a:t>
-            </a:r>
-          </a:p>
-          <a:p>
-            <a:r>
-              <a:rPr lang="ru-RU" dirty="0" smtClean="0"/>
-              <a:t>Проверка ролей реализована через </a:t>
-            </a:r>
-            <a:r>
-              <a:rPr lang="ru-RU" dirty="0" err="1" smtClean="0"/>
-              <a:t>миксины</a:t>
-            </a:r>
-            <a:r>
-              <a:rPr lang="ru-RU" dirty="0" smtClean="0"/>
-              <a:t> </a:t>
-            </a:r>
-            <a:r>
-              <a:rPr lang="ru-RU" dirty="0" err="1" smtClean="0"/>
-              <a:t>UserPassesTestMixin</a:t>
-            </a:r>
-            <a:r>
-              <a:rPr lang="ru-RU" dirty="0" smtClean="0"/>
-              <a:t> и декораторы @</a:t>
-            </a:r>
-            <a:r>
-              <a:rPr lang="ru-RU" dirty="0" err="1" smtClean="0"/>
-              <a:t>user_passes_test</a:t>
+              <a:t>).</a:t>
             </a:r>
             <a:endParaRPr lang="ru-RU" dirty="0"/>
           </a:p>
@@ -7353,7 +7213,7 @@
     </p:spTree>
     <p:extLst>
       <p:ext uri="{BB962C8B-B14F-4D97-AF65-F5344CB8AC3E}">
-        <p14:creationId xmlns:p14="http://schemas.microsoft.com/office/powerpoint/2010/main" val="3490234072"/>
+        <p14:creationId xmlns:p14="http://schemas.microsoft.com/office/powerpoint/2010/main" val="159514172"/>
       </p:ext>
     </p:extLst>
   </p:cSld>
